--- a/PPTs/Ch3_ARM_ISA Exercises ANS.pptx
+++ b/PPTs/Ch3_ARM_ISA Exercises ANS.pptx
@@ -4716,7 +4716,7 @@
           <a:p>
             <a:r>
               <a:rPr lang="en-US" dirty="0"/>
-              <a:t>Spring 2026</a:t>
+              <a:t>Fall 2026</a:t>
             </a:r>
           </a:p>
         </p:txBody>
@@ -11528,7 +11528,7 @@
                 </a:solidFill>
                 <a:latin typeface="Gill Sans MT"/>
               </a:rPr>
-              <a:t>What are the memory address of these four words?</a:t>
+              <a:t>What are the memory addresses of these four words?</a:t>
             </a:r>
           </a:p>
         </p:txBody>
@@ -14208,7 +14208,7 @@
                   <a:cs typeface="Courier New" charset="0"/>
                   <a:sym typeface="Courier New" charset="0"/>
                 </a:rPr>
-                <a:t>0x0012</a:t>
+                <a:t>0x000C</a:t>
               </a:r>
               <a:endParaRPr lang="en-US" sz="1300" b="1" dirty="0">
                 <a:solidFill>
@@ -15158,7 +15158,7 @@
                 </a:solidFill>
                 <a:latin typeface="Gill Sans MT"/>
               </a:rPr>
-              <a:t>What are the memory address of these four words?</a:t>
+              <a:t>What are the memory addresses of these four words?</a:t>
             </a:r>
           </a:p>
           <a:p>
